--- a/S03_Conjuntos/Clase 5.pptx
+++ b/S03_Conjuntos/Clase 5.pptx
@@ -9648,8 +9648,8 @@
           </a:p>
         </p:txBody>
       </p:sp>
-      <mc:AlternateContent xmlns:mc="http://schemas.openxmlformats.org/markup-compatibility/2006">
-        <mc:Choice xmlns:a14="http://schemas.microsoft.com/office/drawing/2010/main" Requires="a14">
+      <mc:AlternateContent xmlns:mc="http://schemas.openxmlformats.org/markup-compatibility/2006" xmlns:a14="http://schemas.microsoft.com/office/drawing/2010/main">
+        <mc:Choice Requires="a14">
           <p:sp>
             <p:nvSpPr>
               <p:cNvPr id="3" name="Text Placeholder 2">
@@ -9705,7 +9705,9 @@
                 <a14:m>
                   <m:oMath xmlns:m="http://schemas.openxmlformats.org/officeDocument/2006/math">
                     <m:r>
-                      <a:rPr lang="es-ES" i="1"/>
+                      <a:rPr lang="es-ES" i="1">
+                        <a:latin typeface="Cambria Math" panose="02040503050406030204" pitchFamily="18" charset="0"/>
+                      </a:rPr>
                       <m:t>𝑥</m:t>
                     </m:r>
                   </m:oMath>
@@ -9717,7 +9719,9 @@
                 <a14:m>
                   <m:oMath xmlns:m="http://schemas.openxmlformats.org/officeDocument/2006/math">
                     <m:r>
-                      <a:rPr lang="es-ES" i="1"/>
+                      <a:rPr lang="es-ES" i="1">
+                        <a:latin typeface="Cambria Math" panose="02040503050406030204" pitchFamily="18" charset="0"/>
+                      </a:rPr>
                       <m:t>𝑦</m:t>
                     </m:r>
                   </m:oMath>
@@ -9729,7 +9733,9 @@
                 <a14:m>
                   <m:oMath xmlns:m="http://schemas.openxmlformats.org/officeDocument/2006/math">
                     <m:r>
-                      <a:rPr lang="es-ES" i="1"/>
+                      <a:rPr lang="es-ES" i="1">
+                        <a:latin typeface="Cambria Math" panose="02040503050406030204" pitchFamily="18" charset="0"/>
+                      </a:rPr>
                       <m:t>𝑢</m:t>
                     </m:r>
                   </m:oMath>
@@ -9741,7 +9747,9 @@
                 <a14:m>
                   <m:oMath xmlns:m="http://schemas.openxmlformats.org/officeDocument/2006/math">
                     <m:r>
-                      <a:rPr lang="es-ES" i="1"/>
+                      <a:rPr lang="es-ES" i="1">
+                        <a:latin typeface="Cambria Math" panose="02040503050406030204" pitchFamily="18" charset="0"/>
+                      </a:rPr>
                       <m:t>𝑥</m:t>
                     </m:r>
                   </m:oMath>
@@ -9753,7 +9761,9 @@
                 <a14:m>
                   <m:oMath xmlns:m="http://schemas.openxmlformats.org/officeDocument/2006/math">
                     <m:r>
-                      <a:rPr lang="es-ES" i="1"/>
+                      <a:rPr lang="es-ES" i="1">
+                        <a:latin typeface="Cambria Math" panose="02040503050406030204" pitchFamily="18" charset="0"/>
+                      </a:rPr>
                       <m:t>𝑦</m:t>
                     </m:r>
                   </m:oMath>
@@ -9763,7 +9773,7 @@
             </p:txBody>
           </p:sp>
         </mc:Choice>
-        <mc:Fallback>
+        <mc:Fallback xmlns="">
           <p:sp>
             <p:nvSpPr>
               <p:cNvPr id="3" name="Text Placeholder 2">
@@ -10164,7 +10174,7 @@
                 </a:r>
                 <a:r>
                   <a:rPr lang="en-US" dirty="0" err="1"/>
-                  <a:t>tienes</a:t>
+                  <a:t>tenes</a:t>
                 </a:r>
                 <a:r>
                   <a:rPr lang="en-US" dirty="0"/>
@@ -10173,7 +10183,9 @@
                 <a14:m>
                   <m:oMath xmlns:m="http://schemas.openxmlformats.org/officeDocument/2006/math">
                     <m:r>
-                      <a:rPr lang="en-US" i="1"/>
+                      <a:rPr lang="en-US" i="1">
+                        <a:latin typeface="Cambria Math" panose="02040503050406030204" pitchFamily="18" charset="0"/>
+                      </a:rPr>
                       <m:t>𝑥</m:t>
                     </m:r>
                   </m:oMath>
@@ -10201,18 +10213,24 @@
                 <a14:m>
                   <m:oMath xmlns:m="http://schemas.openxmlformats.org/officeDocument/2006/math">
                     <m:r>
-                      <a:rPr lang="en-US" i="1"/>
+                      <a:rPr lang="en-US" i="1">
+                        <a:latin typeface="Cambria Math" panose="02040503050406030204" pitchFamily="18" charset="0"/>
+                      </a:rPr>
                       <m:t>𝑃</m:t>
                     </m:r>
                     <m:d>
                       <m:dPr>
                         <m:ctrlPr>
-                          <a:rPr lang="ar-AE" i="1"/>
+                          <a:rPr lang="ar-AE" i="1">
+                            <a:latin typeface="Cambria Math" panose="02040503050406030204" pitchFamily="18" charset="0"/>
+                          </a:rPr>
                         </m:ctrlPr>
                       </m:dPr>
                       <m:e>
                         <m:r>
-                          <a:rPr lang="ar-AE" i="1"/>
+                          <a:rPr lang="ar-AE" i="1">
+                            <a:latin typeface="Cambria Math" panose="02040503050406030204" pitchFamily="18" charset="0"/>
+                          </a:rPr>
                           <m:t>𝑧</m:t>
                         </m:r>
                       </m:e>
@@ -10274,7 +10292,9 @@
                 <a14:m>
                   <m:oMath xmlns:m="http://schemas.openxmlformats.org/officeDocument/2006/math">
                     <m:r>
-                      <a:rPr lang="en-US" i="1"/>
+                      <a:rPr lang="en-US" i="1">
+                        <a:latin typeface="Cambria Math" panose="02040503050406030204" pitchFamily="18" charset="0"/>
+                      </a:rPr>
                       <m:t>𝑥</m:t>
                     </m:r>
                     <m:r>
@@ -10567,8 +10587,8 @@
           </a:p>
         </p:txBody>
       </p:sp>
-      <mc:AlternateContent xmlns:mc="http://schemas.openxmlformats.org/markup-compatibility/2006">
-        <mc:Choice xmlns:a14="http://schemas.microsoft.com/office/drawing/2010/main" Requires="a14">
+      <mc:AlternateContent xmlns:mc="http://schemas.openxmlformats.org/markup-compatibility/2006" xmlns:a14="http://schemas.microsoft.com/office/drawing/2010/main">
+        <mc:Choice Requires="a14">
           <p:sp>
             <p:nvSpPr>
               <p:cNvPr id="3" name="Text Placeholder 2">
@@ -10601,7 +10621,9 @@
                 <a14:m>
                   <m:oMath xmlns:m="http://schemas.openxmlformats.org/officeDocument/2006/math">
                     <m:r>
-                      <a:rPr lang="es-ES" i="1"/>
+                      <a:rPr lang="es-ES" i="1">
+                        <a:latin typeface="Cambria Math" panose="02040503050406030204" pitchFamily="18" charset="0"/>
+                      </a:rPr>
                       <m:t>𝐴</m:t>
                     </m:r>
                   </m:oMath>
@@ -10650,15 +10672,21 @@
                 <a14:m>
                   <m:oMath xmlns:m="http://schemas.openxmlformats.org/officeDocument/2006/math">
                     <m:r>
-                      <a:rPr lang="en-US" i="1"/>
+                      <a:rPr lang="en-US" i="1">
+                        <a:latin typeface="Cambria Math" panose="02040503050406030204" pitchFamily="18" charset="0"/>
+                      </a:rPr>
                       <m:t>𝑥</m:t>
                     </m:r>
                     <m:r>
-                      <a:rPr lang="en-US"/>
+                      <a:rPr lang="en-US">
+                        <a:latin typeface="Cambria Math" panose="02040503050406030204" pitchFamily="18" charset="0"/>
+                      </a:rPr>
                       <m:t>∈</m:t>
                     </m:r>
                     <m:r>
-                      <a:rPr lang="en-US" i="1"/>
+                      <a:rPr lang="en-US" i="1">
+                        <a:latin typeface="Cambria Math" panose="02040503050406030204" pitchFamily="18" charset="0"/>
+                      </a:rPr>
                       <m:t>𝑥</m:t>
                     </m:r>
                   </m:oMath>
@@ -10705,87 +10733,117 @@
                       <m:sSub>
                         <m:sSubPr>
                           <m:ctrlPr>
-                            <a:rPr lang="ar-AE"/>
+                            <a:rPr lang="ar-AE" i="1">
+                              <a:latin typeface="Cambria Math" panose="02040503050406030204" pitchFamily="18" charset="0"/>
+                            </a:rPr>
                           </m:ctrlPr>
                         </m:sSubPr>
                         <m:e>
                           <m:r>
-                            <a:rPr lang="ar-AE" i="1"/>
+                            <a:rPr lang="ar-AE" i="1">
+                              <a:latin typeface="Cambria Math" panose="02040503050406030204" pitchFamily="18" charset="0"/>
+                            </a:rPr>
                             <m:t>𝑥</m:t>
                           </m:r>
                         </m:e>
                         <m:sub>
                           <m:r>
-                            <a:rPr lang="ar-AE"/>
+                            <a:rPr lang="ar-AE">
+                              <a:latin typeface="Cambria Math" panose="02040503050406030204" pitchFamily="18" charset="0"/>
+                            </a:rPr>
                             <m:t>0</m:t>
                           </m:r>
                         </m:sub>
                       </m:sSub>
                       <m:r>
-                        <a:rPr lang="ar-AE"/>
+                        <a:rPr lang="ar-AE">
+                          <a:latin typeface="Cambria Math" panose="02040503050406030204" pitchFamily="18" charset="0"/>
+                        </a:rPr>
                         <m:t>∈</m:t>
                       </m:r>
                       <m:sSub>
                         <m:sSubPr>
                           <m:ctrlPr>
-                            <a:rPr lang="ar-AE" i="1"/>
+                            <a:rPr lang="ar-AE" i="1">
+                              <a:latin typeface="Cambria Math" panose="02040503050406030204" pitchFamily="18" charset="0"/>
+                            </a:rPr>
                           </m:ctrlPr>
                         </m:sSubPr>
                         <m:e>
                           <m:r>
-                            <a:rPr lang="ar-AE" i="1"/>
+                            <a:rPr lang="ar-AE" i="1">
+                              <a:latin typeface="Cambria Math" panose="02040503050406030204" pitchFamily="18" charset="0"/>
+                            </a:rPr>
                             <m:t>𝑥</m:t>
                           </m:r>
                         </m:e>
                         <m:sub>
                           <m:r>
-                            <a:rPr lang="ar-AE"/>
+                            <a:rPr lang="ar-AE">
+                              <a:latin typeface="Cambria Math" panose="02040503050406030204" pitchFamily="18" charset="0"/>
+                            </a:rPr>
                             <m:t>1</m:t>
                           </m:r>
                         </m:sub>
                       </m:sSub>
                       <m:r>
-                        <a:rPr lang="ar-AE"/>
+                        <a:rPr lang="ar-AE">
+                          <a:latin typeface="Cambria Math" panose="02040503050406030204" pitchFamily="18" charset="0"/>
+                        </a:rPr>
                         <m:t>∈⋯∈</m:t>
                       </m:r>
                       <m:sSub>
                         <m:sSubPr>
                           <m:ctrlPr>
-                            <a:rPr lang="ar-AE" i="1"/>
+                            <a:rPr lang="ar-AE" i="1">
+                              <a:latin typeface="Cambria Math" panose="02040503050406030204" pitchFamily="18" charset="0"/>
+                            </a:rPr>
                           </m:ctrlPr>
                         </m:sSubPr>
                         <m:e>
                           <m:r>
-                            <a:rPr lang="ar-AE" i="1"/>
+                            <a:rPr lang="ar-AE" i="1">
+                              <a:latin typeface="Cambria Math" panose="02040503050406030204" pitchFamily="18" charset="0"/>
+                            </a:rPr>
                             <m:t>𝑥</m:t>
                           </m:r>
                         </m:e>
                         <m:sub>
                           <m:r>
-                            <a:rPr lang="ar-AE" i="1"/>
+                            <a:rPr lang="ar-AE" i="1">
+                              <a:latin typeface="Cambria Math" panose="02040503050406030204" pitchFamily="18" charset="0"/>
+                            </a:rPr>
                             <m:t>𝑛</m:t>
                           </m:r>
                         </m:sub>
                       </m:sSub>
                       <m:r>
-                        <a:rPr lang="ar-AE"/>
+                        <a:rPr lang="ar-AE">
+                          <a:latin typeface="Cambria Math" panose="02040503050406030204" pitchFamily="18" charset="0"/>
+                        </a:rPr>
                         <m:t>∈</m:t>
                       </m:r>
                       <m:sSub>
                         <m:sSubPr>
                           <m:ctrlPr>
-                            <a:rPr lang="ar-AE" i="1"/>
+                            <a:rPr lang="ar-AE" i="1">
+                              <a:latin typeface="Cambria Math" panose="02040503050406030204" pitchFamily="18" charset="0"/>
+                            </a:rPr>
                           </m:ctrlPr>
                         </m:sSubPr>
                         <m:e>
                           <m:r>
-                            <a:rPr lang="ar-AE" i="1"/>
+                            <a:rPr lang="ar-AE" i="1">
+                              <a:latin typeface="Cambria Math" panose="02040503050406030204" pitchFamily="18" charset="0"/>
+                            </a:rPr>
                             <m:t>𝑥</m:t>
                           </m:r>
                         </m:e>
                         <m:sub>
                           <m:r>
-                            <a:rPr lang="ar-AE"/>
+                            <a:rPr lang="ar-AE">
+                              <a:latin typeface="Cambria Math" panose="02040503050406030204" pitchFamily="18" charset="0"/>
+                            </a:rPr>
                             <m:t>0</m:t>
                           </m:r>
                         </m:sub>
@@ -10812,7 +10870,7 @@
             </p:txBody>
           </p:sp>
         </mc:Choice>
-        <mc:Fallback>
+        <mc:Fallback xmlns="">
           <p:sp>
             <p:nvSpPr>
               <p:cNvPr id="3" name="Text Placeholder 2">
